--- a/VD_VENTURELAB/VD_BusinessCreationICT_Day_1-5_Slides_v11-1.pptx
+++ b/VD_VENTURELAB/VD_BusinessCreationICT_Day_1-5_Slides_v11-1.pptx
@@ -9991,10 +9991,10 @@
         </p:nvGrpSpPr>
         <p:grpSpPr>
           <a:xfrm>
-            <a:off x="1849120" y="4500880"/>
-            <a:ext cx="650240" cy="999090"/>
-            <a:chOff x="1605280" y="4500880"/>
-            <a:chExt cx="650240" cy="999090"/>
+            <a:off x="1849120" y="4861771"/>
+            <a:ext cx="650240" cy="696458"/>
+            <a:chOff x="1605280" y="4634235"/>
+            <a:chExt cx="650240" cy="696458"/>
           </a:xfrm>
         </p:grpSpPr>
         <p:cxnSp>
@@ -10013,8 +10013,8 @@
           </p:nvCxnSpPr>
           <p:spPr>
             <a:xfrm>
-              <a:off x="1930400" y="4500880"/>
-              <a:ext cx="0" cy="589280"/>
+              <a:off x="1930400" y="4634235"/>
+              <a:ext cx="0" cy="455925"/>
             </a:xfrm>
             <a:prstGeom prst="line">
               <a:avLst/>
@@ -10058,7 +10058,7 @@
           <p:spPr>
             <a:xfrm>
               <a:off x="1605280" y="5069083"/>
-              <a:ext cx="650240" cy="430887"/>
+              <a:ext cx="650240" cy="261610"/>
             </a:xfrm>
             <a:prstGeom prst="rect">
               <a:avLst/>
@@ -10082,11 +10082,1202 @@
                   <a:latin typeface="Arial" panose="020B0604020202020204" pitchFamily="34" charset="0"/>
                   <a:cs typeface="Arial" panose="020B0604020202020204" pitchFamily="34" charset="0"/>
                 </a:rPr>
-                <a:t>1 LIVE PILOT</a:t>
+                <a:t>PILOT</a:t>
               </a:r>
             </a:p>
           </p:txBody>
         </p:sp>
+      </p:grpSp>
+      <p:grpSp>
+        <p:nvGrpSpPr>
+          <p:cNvPr id="35" name="Group 34">
+            <a:extLst>
+              <a:ext uri="{FF2B5EF4-FFF2-40B4-BE49-F238E27FC236}">
+                <a16:creationId xmlns:a16="http://schemas.microsoft.com/office/drawing/2014/main" id="{6AF3E0A1-776F-40CE-A5BC-B43D3DEA831B}"/>
+              </a:ext>
+            </a:extLst>
+          </p:cNvPr>
+          <p:cNvGrpSpPr/>
+          <p:nvPr/>
+        </p:nvGrpSpPr>
+        <p:grpSpPr>
+          <a:xfrm>
+            <a:off x="2353056" y="4857763"/>
+            <a:ext cx="650240" cy="696458"/>
+            <a:chOff x="1605280" y="4634235"/>
+            <a:chExt cx="650240" cy="696458"/>
+          </a:xfrm>
+        </p:grpSpPr>
+        <p:cxnSp>
+          <p:nvCxnSpPr>
+            <p:cNvPr id="39" name="Straight Connector 38">
+              <a:extLst>
+                <a:ext uri="{FF2B5EF4-FFF2-40B4-BE49-F238E27FC236}">
+                  <a16:creationId xmlns:a16="http://schemas.microsoft.com/office/drawing/2014/main" id="{000299F0-CFD1-49E7-46FB-A64B586571C7}"/>
+                </a:ext>
+              </a:extLst>
+            </p:cNvPr>
+            <p:cNvCxnSpPr>
+              <a:cxnSpLocks/>
+            </p:cNvCxnSpPr>
+            <p:nvPr/>
+          </p:nvCxnSpPr>
+          <p:spPr>
+            <a:xfrm>
+              <a:off x="1930400" y="4634235"/>
+              <a:ext cx="0" cy="455925"/>
+            </a:xfrm>
+            <a:prstGeom prst="line">
+              <a:avLst/>
+            </a:prstGeom>
+            <a:ln w="76200">
+              <a:solidFill>
+                <a:schemeClr val="accent1">
+                  <a:lumMod val="60000"/>
+                  <a:lumOff val="40000"/>
+                </a:schemeClr>
+              </a:solidFill>
+              <a:prstDash val="sysDot"/>
+            </a:ln>
+          </p:spPr>
+          <p:style>
+            <a:lnRef idx="1">
+              <a:schemeClr val="accent1"/>
+            </a:lnRef>
+            <a:fillRef idx="0">
+              <a:schemeClr val="accent1"/>
+            </a:fillRef>
+            <a:effectRef idx="0">
+              <a:schemeClr val="accent1"/>
+            </a:effectRef>
+            <a:fontRef idx="minor">
+              <a:schemeClr val="tx1"/>
+            </a:fontRef>
+          </p:style>
+        </p:cxnSp>
+        <p:sp>
+          <p:nvSpPr>
+            <p:cNvPr id="40" name="TextBox 39">
+              <a:extLst>
+                <a:ext uri="{FF2B5EF4-FFF2-40B4-BE49-F238E27FC236}">
+                  <a16:creationId xmlns:a16="http://schemas.microsoft.com/office/drawing/2014/main" id="{E0B60223-0C0F-6304-8FD1-DC3568F28188}"/>
+                </a:ext>
+              </a:extLst>
+            </p:cNvPr>
+            <p:cNvSpPr txBox="1"/>
+            <p:nvPr/>
+          </p:nvSpPr>
+          <p:spPr>
+            <a:xfrm>
+              <a:off x="1605280" y="5069083"/>
+              <a:ext cx="650240" cy="261610"/>
+            </a:xfrm>
+            <a:prstGeom prst="rect">
+              <a:avLst/>
+            </a:prstGeom>
+            <a:noFill/>
+          </p:spPr>
+          <p:txBody>
+            <a:bodyPr wrap="square" rtlCol="0">
+              <a:spAutoFit/>
+            </a:bodyPr>
+            <a:lstStyle/>
+            <a:p>
+              <a:pPr algn="ctr"/>
+              <a:r>
+                <a:rPr lang="en-CH" sz="1100" dirty="0">
+                  <a:solidFill>
+                    <a:schemeClr val="bg1">
+                      <a:lumMod val="50000"/>
+                    </a:schemeClr>
+                  </a:solidFill>
+                  <a:latin typeface="Arial" panose="020B0604020202020204" pitchFamily="34" charset="0"/>
+                  <a:cs typeface="Arial" panose="020B0604020202020204" pitchFamily="34" charset="0"/>
+                </a:rPr>
+                <a:t>BC ICT</a:t>
+              </a:r>
+            </a:p>
+          </p:txBody>
+        </p:sp>
+      </p:grpSp>
+      <p:grpSp>
+        <p:nvGrpSpPr>
+          <p:cNvPr id="51" name="Group 50">
+            <a:extLst>
+              <a:ext uri="{FF2B5EF4-FFF2-40B4-BE49-F238E27FC236}">
+                <a16:creationId xmlns:a16="http://schemas.microsoft.com/office/drawing/2014/main" id="{FFE300FF-44D2-E106-45F8-C5CF2ED03EE6}"/>
+              </a:ext>
+            </a:extLst>
+          </p:cNvPr>
+          <p:cNvGrpSpPr/>
+          <p:nvPr/>
+        </p:nvGrpSpPr>
+        <p:grpSpPr>
+          <a:xfrm>
+            <a:off x="7797121" y="4868866"/>
+            <a:ext cx="944544" cy="696458"/>
+            <a:chOff x="1310977" y="4634235"/>
+            <a:chExt cx="944544" cy="696458"/>
+          </a:xfrm>
+        </p:grpSpPr>
+        <p:cxnSp>
+          <p:nvCxnSpPr>
+            <p:cNvPr id="52" name="Straight Connector 51">
+              <a:extLst>
+                <a:ext uri="{FF2B5EF4-FFF2-40B4-BE49-F238E27FC236}">
+                  <a16:creationId xmlns:a16="http://schemas.microsoft.com/office/drawing/2014/main" id="{7146387A-E152-AAAE-7789-E3A31F551065}"/>
+                </a:ext>
+              </a:extLst>
+            </p:cNvPr>
+            <p:cNvCxnSpPr>
+              <a:cxnSpLocks/>
+            </p:cNvCxnSpPr>
+            <p:nvPr/>
+          </p:nvCxnSpPr>
+          <p:spPr>
+            <a:xfrm>
+              <a:off x="1930400" y="4634235"/>
+              <a:ext cx="0" cy="455925"/>
+            </a:xfrm>
+            <a:prstGeom prst="line">
+              <a:avLst/>
+            </a:prstGeom>
+            <a:ln w="76200">
+              <a:solidFill>
+                <a:schemeClr val="accent2">
+                  <a:lumMod val="60000"/>
+                  <a:lumOff val="40000"/>
+                </a:schemeClr>
+              </a:solidFill>
+              <a:prstDash val="sysDot"/>
+            </a:ln>
+          </p:spPr>
+          <p:style>
+            <a:lnRef idx="1">
+              <a:schemeClr val="accent1"/>
+            </a:lnRef>
+            <a:fillRef idx="0">
+              <a:schemeClr val="accent1"/>
+            </a:fillRef>
+            <a:effectRef idx="0">
+              <a:schemeClr val="accent1"/>
+            </a:effectRef>
+            <a:fontRef idx="minor">
+              <a:schemeClr val="tx1"/>
+            </a:fontRef>
+          </p:style>
+        </p:cxnSp>
+        <p:sp>
+          <p:nvSpPr>
+            <p:cNvPr id="53" name="TextBox 52">
+              <a:extLst>
+                <a:ext uri="{FF2B5EF4-FFF2-40B4-BE49-F238E27FC236}">
+                  <a16:creationId xmlns:a16="http://schemas.microsoft.com/office/drawing/2014/main" id="{040074A1-1DBA-4BD1-C2BF-E20DCA7B14A8}"/>
+                </a:ext>
+              </a:extLst>
+            </p:cNvPr>
+            <p:cNvSpPr txBox="1"/>
+            <p:nvPr/>
+          </p:nvSpPr>
+          <p:spPr>
+            <a:xfrm>
+              <a:off x="1310977" y="5069083"/>
+              <a:ext cx="944544" cy="261610"/>
+            </a:xfrm>
+            <a:prstGeom prst="rect">
+              <a:avLst/>
+            </a:prstGeom>
+            <a:noFill/>
+          </p:spPr>
+          <p:txBody>
+            <a:bodyPr wrap="square" rtlCol="0">
+              <a:spAutoFit/>
+            </a:bodyPr>
+            <a:lstStyle/>
+            <a:p>
+              <a:pPr algn="ctr"/>
+              <a:r>
+                <a:rPr lang="en-CH" sz="1100" dirty="0">
+                  <a:solidFill>
+                    <a:schemeClr val="bg1">
+                      <a:lumMod val="50000"/>
+                    </a:schemeClr>
+                  </a:solidFill>
+                  <a:latin typeface="Arial" panose="020B0604020202020204" pitchFamily="34" charset="0"/>
+                  <a:cs typeface="Arial" panose="020B0604020202020204" pitchFamily="34" charset="0"/>
+                </a:rPr>
+                <a:t>120 - 300K</a:t>
+              </a:r>
+            </a:p>
+          </p:txBody>
+        </p:sp>
+      </p:grpSp>
+      <p:grpSp>
+        <p:nvGrpSpPr>
+          <p:cNvPr id="57" name="Group 56">
+            <a:extLst>
+              <a:ext uri="{FF2B5EF4-FFF2-40B4-BE49-F238E27FC236}">
+                <a16:creationId xmlns:a16="http://schemas.microsoft.com/office/drawing/2014/main" id="{CE251171-F0E2-BDB6-28EE-E37626DA6354}"/>
+              </a:ext>
+            </a:extLst>
+          </p:cNvPr>
+          <p:cNvGrpSpPr/>
+          <p:nvPr/>
+        </p:nvGrpSpPr>
+        <p:grpSpPr>
+          <a:xfrm>
+            <a:off x="10569976" y="4857763"/>
+            <a:ext cx="944544" cy="696458"/>
+            <a:chOff x="1310977" y="4634235"/>
+            <a:chExt cx="944544" cy="696458"/>
+          </a:xfrm>
+        </p:grpSpPr>
+        <p:cxnSp>
+          <p:nvCxnSpPr>
+            <p:cNvPr id="58" name="Straight Connector 57">
+              <a:extLst>
+                <a:ext uri="{FF2B5EF4-FFF2-40B4-BE49-F238E27FC236}">
+                  <a16:creationId xmlns:a16="http://schemas.microsoft.com/office/drawing/2014/main" id="{4707BE9A-99BF-658D-FF58-267731273209}"/>
+                </a:ext>
+              </a:extLst>
+            </p:cNvPr>
+            <p:cNvCxnSpPr>
+              <a:cxnSpLocks/>
+            </p:cNvCxnSpPr>
+            <p:nvPr/>
+          </p:nvCxnSpPr>
+          <p:spPr>
+            <a:xfrm>
+              <a:off x="1930400" y="4634235"/>
+              <a:ext cx="0" cy="455925"/>
+            </a:xfrm>
+            <a:prstGeom prst="line">
+              <a:avLst/>
+            </a:prstGeom>
+            <a:ln w="76200">
+              <a:solidFill>
+                <a:schemeClr val="accent2">
+                  <a:lumMod val="60000"/>
+                  <a:lumOff val="40000"/>
+                </a:schemeClr>
+              </a:solidFill>
+              <a:prstDash val="sysDot"/>
+            </a:ln>
+          </p:spPr>
+          <p:style>
+            <a:lnRef idx="1">
+              <a:schemeClr val="accent1"/>
+            </a:lnRef>
+            <a:fillRef idx="0">
+              <a:schemeClr val="accent1"/>
+            </a:fillRef>
+            <a:effectRef idx="0">
+              <a:schemeClr val="accent1"/>
+            </a:effectRef>
+            <a:fontRef idx="minor">
+              <a:schemeClr val="tx1"/>
+            </a:fontRef>
+          </p:style>
+        </p:cxnSp>
+        <p:sp>
+          <p:nvSpPr>
+            <p:cNvPr id="59" name="TextBox 58">
+              <a:extLst>
+                <a:ext uri="{FF2B5EF4-FFF2-40B4-BE49-F238E27FC236}">
+                  <a16:creationId xmlns:a16="http://schemas.microsoft.com/office/drawing/2014/main" id="{D523EA91-337C-4D26-7FEF-589DC5453B2F}"/>
+                </a:ext>
+              </a:extLst>
+            </p:cNvPr>
+            <p:cNvSpPr txBox="1"/>
+            <p:nvPr/>
+          </p:nvSpPr>
+          <p:spPr>
+            <a:xfrm>
+              <a:off x="1310977" y="5069083"/>
+              <a:ext cx="944544" cy="261610"/>
+            </a:xfrm>
+            <a:prstGeom prst="rect">
+              <a:avLst/>
+            </a:prstGeom>
+            <a:noFill/>
+          </p:spPr>
+          <p:txBody>
+            <a:bodyPr wrap="square" rtlCol="0">
+              <a:spAutoFit/>
+            </a:bodyPr>
+            <a:lstStyle/>
+            <a:p>
+              <a:pPr algn="ctr"/>
+              <a:r>
+                <a:rPr lang="en-CH" sz="1100" dirty="0">
+                  <a:solidFill>
+                    <a:schemeClr val="bg1">
+                      <a:lumMod val="50000"/>
+                    </a:schemeClr>
+                  </a:solidFill>
+                  <a:latin typeface="Arial" panose="020B0604020202020204" pitchFamily="34" charset="0"/>
+                  <a:cs typeface="Arial" panose="020B0604020202020204" pitchFamily="34" charset="0"/>
+                </a:rPr>
+                <a:t>240 - 600K</a:t>
+              </a:r>
+            </a:p>
+          </p:txBody>
+        </p:sp>
+      </p:grpSp>
+      <p:grpSp>
+        <p:nvGrpSpPr>
+          <p:cNvPr id="60" name="Group 59">
+            <a:extLst>
+              <a:ext uri="{FF2B5EF4-FFF2-40B4-BE49-F238E27FC236}">
+                <a16:creationId xmlns:a16="http://schemas.microsoft.com/office/drawing/2014/main" id="{7BA88985-F263-98B7-780C-519E3A8B4501}"/>
+              </a:ext>
+            </a:extLst>
+          </p:cNvPr>
+          <p:cNvGrpSpPr/>
+          <p:nvPr/>
+        </p:nvGrpSpPr>
+        <p:grpSpPr>
+          <a:xfrm>
+            <a:off x="5026489" y="4887260"/>
+            <a:ext cx="944544" cy="696458"/>
+            <a:chOff x="1310977" y="4634235"/>
+            <a:chExt cx="944544" cy="696458"/>
+          </a:xfrm>
+        </p:grpSpPr>
+        <p:cxnSp>
+          <p:nvCxnSpPr>
+            <p:cNvPr id="61" name="Straight Connector 60">
+              <a:extLst>
+                <a:ext uri="{FF2B5EF4-FFF2-40B4-BE49-F238E27FC236}">
+                  <a16:creationId xmlns:a16="http://schemas.microsoft.com/office/drawing/2014/main" id="{5EC288D7-4567-B47C-6469-BBA0113D6A7C}"/>
+                </a:ext>
+              </a:extLst>
+            </p:cNvPr>
+            <p:cNvCxnSpPr>
+              <a:cxnSpLocks/>
+            </p:cNvCxnSpPr>
+            <p:nvPr/>
+          </p:nvCxnSpPr>
+          <p:spPr>
+            <a:xfrm>
+              <a:off x="1930400" y="4634235"/>
+              <a:ext cx="0" cy="455925"/>
+            </a:xfrm>
+            <a:prstGeom prst="line">
+              <a:avLst/>
+            </a:prstGeom>
+            <a:ln w="76200">
+              <a:solidFill>
+                <a:schemeClr val="accent2">
+                  <a:lumMod val="60000"/>
+                  <a:lumOff val="40000"/>
+                </a:schemeClr>
+              </a:solidFill>
+              <a:prstDash val="sysDot"/>
+            </a:ln>
+          </p:spPr>
+          <p:style>
+            <a:lnRef idx="1">
+              <a:schemeClr val="accent1"/>
+            </a:lnRef>
+            <a:fillRef idx="0">
+              <a:schemeClr val="accent1"/>
+            </a:fillRef>
+            <a:effectRef idx="0">
+              <a:schemeClr val="accent1"/>
+            </a:effectRef>
+            <a:fontRef idx="minor">
+              <a:schemeClr val="tx1"/>
+            </a:fontRef>
+          </p:style>
+        </p:cxnSp>
+        <p:sp>
+          <p:nvSpPr>
+            <p:cNvPr id="62" name="TextBox 61">
+              <a:extLst>
+                <a:ext uri="{FF2B5EF4-FFF2-40B4-BE49-F238E27FC236}">
+                  <a16:creationId xmlns:a16="http://schemas.microsoft.com/office/drawing/2014/main" id="{F131AE5E-109C-7DB5-44C6-F88F959D5106}"/>
+                </a:ext>
+              </a:extLst>
+            </p:cNvPr>
+            <p:cNvSpPr txBox="1"/>
+            <p:nvPr/>
+          </p:nvSpPr>
+          <p:spPr>
+            <a:xfrm>
+              <a:off x="1310977" y="5069083"/>
+              <a:ext cx="944544" cy="261610"/>
+            </a:xfrm>
+            <a:prstGeom prst="rect">
+              <a:avLst/>
+            </a:prstGeom>
+            <a:noFill/>
+          </p:spPr>
+          <p:txBody>
+            <a:bodyPr wrap="square" rtlCol="0">
+              <a:spAutoFit/>
+            </a:bodyPr>
+            <a:lstStyle/>
+            <a:p>
+              <a:pPr algn="ctr"/>
+              <a:r>
+                <a:rPr lang="en-CH" sz="1100" dirty="0">
+                  <a:solidFill>
+                    <a:schemeClr val="bg1">
+                      <a:lumMod val="50000"/>
+                    </a:schemeClr>
+                  </a:solidFill>
+                  <a:latin typeface="Arial" panose="020B0604020202020204" pitchFamily="34" charset="0"/>
+                  <a:cs typeface="Arial" panose="020B0604020202020204" pitchFamily="34" charset="0"/>
+                </a:rPr>
+                <a:t>50 - 120K</a:t>
+              </a:r>
+            </a:p>
+          </p:txBody>
+        </p:sp>
+      </p:grpSp>
+      <p:sp>
+        <p:nvSpPr>
+          <p:cNvPr id="63" name="Right Arrow 62">
+            <a:extLst>
+              <a:ext uri="{FF2B5EF4-FFF2-40B4-BE49-F238E27FC236}">
+                <a16:creationId xmlns:a16="http://schemas.microsoft.com/office/drawing/2014/main" id="{ADE2C008-C96A-E73D-4A35-20B92C842E64}"/>
+              </a:ext>
+            </a:extLst>
+          </p:cNvPr>
+          <p:cNvSpPr/>
+          <p:nvPr/>
+        </p:nvSpPr>
+        <p:spPr>
+          <a:xfrm>
+            <a:off x="1195208" y="4386649"/>
+            <a:ext cx="1521225" cy="349943"/>
+          </a:xfrm>
+          <a:prstGeom prst="rightArrow">
+            <a:avLst/>
+          </a:prstGeom>
+          <a:gradFill flip="none" rotWithShape="1">
+            <a:gsLst>
+              <a:gs pos="0">
+                <a:schemeClr val="accent1">
+                  <a:tint val="66000"/>
+                  <a:satMod val="160000"/>
+                </a:schemeClr>
+              </a:gs>
+              <a:gs pos="50000">
+                <a:schemeClr val="accent1">
+                  <a:tint val="44500"/>
+                  <a:satMod val="160000"/>
+                </a:schemeClr>
+              </a:gs>
+              <a:gs pos="100000">
+                <a:schemeClr val="accent1">
+                  <a:tint val="23500"/>
+                  <a:satMod val="160000"/>
+                </a:schemeClr>
+              </a:gs>
+            </a:gsLst>
+            <a:lin ang="10800000" scaled="1"/>
+            <a:tileRect/>
+          </a:gradFill>
+          <a:ln>
+            <a:gradFill>
+              <a:gsLst>
+                <a:gs pos="62974">
+                  <a:srgbClr val="B6C8E8"/>
+                </a:gs>
+                <a:gs pos="0">
+                  <a:schemeClr val="accent1">
+                    <a:lumMod val="5000"/>
+                    <a:lumOff val="95000"/>
+                  </a:schemeClr>
+                </a:gs>
+                <a:gs pos="74000">
+                  <a:schemeClr val="accent1">
+                    <a:lumMod val="45000"/>
+                    <a:lumOff val="55000"/>
+                  </a:schemeClr>
+                </a:gs>
+                <a:gs pos="83000">
+                  <a:schemeClr val="accent1">
+                    <a:lumMod val="45000"/>
+                    <a:lumOff val="55000"/>
+                  </a:schemeClr>
+                </a:gs>
+                <a:gs pos="100000">
+                  <a:schemeClr val="accent1">
+                    <a:lumMod val="30000"/>
+                    <a:lumOff val="70000"/>
+                  </a:schemeClr>
+                </a:gs>
+              </a:gsLst>
+              <a:lin ang="5400000" scaled="1"/>
+            </a:gradFill>
+          </a:ln>
+        </p:spPr>
+        <p:style>
+          <a:lnRef idx="2">
+            <a:schemeClr val="accent1">
+              <a:shade val="15000"/>
+            </a:schemeClr>
+          </a:lnRef>
+          <a:fillRef idx="1">
+            <a:schemeClr val="accent1"/>
+          </a:fillRef>
+          <a:effectRef idx="0">
+            <a:schemeClr val="accent1"/>
+          </a:effectRef>
+          <a:fontRef idx="minor">
+            <a:schemeClr val="lt1"/>
+          </a:fontRef>
+        </p:style>
+        <p:txBody>
+          <a:bodyPr rtlCol="0" anchor="ctr"/>
+          <a:lstStyle/>
+          <a:p>
+            <a:pPr algn="ctr"/>
+            <a:endParaRPr lang="en-CH" dirty="0"/>
+          </a:p>
+        </p:txBody>
+      </p:sp>
+      <p:sp>
+        <p:nvSpPr>
+          <p:cNvPr id="64" name="Right Arrow 63">
+            <a:extLst>
+              <a:ext uri="{FF2B5EF4-FFF2-40B4-BE49-F238E27FC236}">
+                <a16:creationId xmlns:a16="http://schemas.microsoft.com/office/drawing/2014/main" id="{91966F9E-AFF1-5B8B-04E3-E5835E34B62D}"/>
+              </a:ext>
+            </a:extLst>
+          </p:cNvPr>
+          <p:cNvSpPr/>
+          <p:nvPr/>
+        </p:nvSpPr>
+        <p:spPr>
+          <a:xfrm>
+            <a:off x="3998839" y="4390603"/>
+            <a:ext cx="1521225" cy="349943"/>
+          </a:xfrm>
+          <a:prstGeom prst="rightArrow">
+            <a:avLst/>
+          </a:prstGeom>
+          <a:gradFill flip="none" rotWithShape="1">
+            <a:gsLst>
+              <a:gs pos="0">
+                <a:schemeClr val="accent2">
+                  <a:lumMod val="5000"/>
+                  <a:lumOff val="95000"/>
+                </a:schemeClr>
+              </a:gs>
+              <a:gs pos="74000">
+                <a:schemeClr val="accent2">
+                  <a:lumMod val="45000"/>
+                  <a:lumOff val="55000"/>
+                </a:schemeClr>
+              </a:gs>
+              <a:gs pos="83000">
+                <a:schemeClr val="accent2">
+                  <a:lumMod val="45000"/>
+                  <a:lumOff val="55000"/>
+                </a:schemeClr>
+              </a:gs>
+              <a:gs pos="100000">
+                <a:schemeClr val="accent2">
+                  <a:lumMod val="30000"/>
+                  <a:lumOff val="70000"/>
+                </a:schemeClr>
+              </a:gs>
+            </a:gsLst>
+            <a:lin ang="2700000" scaled="1"/>
+            <a:tileRect/>
+          </a:gradFill>
+          <a:ln>
+            <a:gradFill>
+              <a:gsLst>
+                <a:gs pos="62974">
+                  <a:srgbClr val="B6C8E8"/>
+                </a:gs>
+                <a:gs pos="0">
+                  <a:schemeClr val="accent1">
+                    <a:lumMod val="5000"/>
+                    <a:lumOff val="95000"/>
+                  </a:schemeClr>
+                </a:gs>
+                <a:gs pos="74000">
+                  <a:schemeClr val="accent1">
+                    <a:lumMod val="45000"/>
+                    <a:lumOff val="55000"/>
+                  </a:schemeClr>
+                </a:gs>
+                <a:gs pos="83000">
+                  <a:schemeClr val="accent1">
+                    <a:lumMod val="45000"/>
+                    <a:lumOff val="55000"/>
+                  </a:schemeClr>
+                </a:gs>
+                <a:gs pos="100000">
+                  <a:schemeClr val="accent1">
+                    <a:lumMod val="30000"/>
+                    <a:lumOff val="70000"/>
+                  </a:schemeClr>
+                </a:gs>
+              </a:gsLst>
+              <a:lin ang="5400000" scaled="1"/>
+            </a:gradFill>
+          </a:ln>
+        </p:spPr>
+        <p:style>
+          <a:lnRef idx="2">
+            <a:schemeClr val="accent1">
+              <a:shade val="15000"/>
+            </a:schemeClr>
+          </a:lnRef>
+          <a:fillRef idx="1">
+            <a:schemeClr val="accent1"/>
+          </a:fillRef>
+          <a:effectRef idx="0">
+            <a:schemeClr val="accent1"/>
+          </a:effectRef>
+          <a:fontRef idx="minor">
+            <a:schemeClr val="lt1"/>
+          </a:fontRef>
+        </p:style>
+        <p:txBody>
+          <a:bodyPr rtlCol="0" anchor="ctr"/>
+          <a:lstStyle/>
+          <a:p>
+            <a:pPr algn="ctr"/>
+            <a:endParaRPr lang="en-CH" dirty="0"/>
+          </a:p>
+        </p:txBody>
+      </p:sp>
+      <p:sp>
+        <p:nvSpPr>
+          <p:cNvPr id="66" name="Right Arrow 65">
+            <a:extLst>
+              <a:ext uri="{FF2B5EF4-FFF2-40B4-BE49-F238E27FC236}">
+                <a16:creationId xmlns:a16="http://schemas.microsoft.com/office/drawing/2014/main" id="{0A9AF03A-972A-8AE5-4F9A-1BA661E6AEF9}"/>
+              </a:ext>
+            </a:extLst>
+          </p:cNvPr>
+          <p:cNvSpPr/>
+          <p:nvPr/>
+        </p:nvSpPr>
+        <p:spPr>
+          <a:xfrm>
+            <a:off x="6760327" y="4386648"/>
+            <a:ext cx="1521225" cy="349943"/>
+          </a:xfrm>
+          <a:prstGeom prst="rightArrow">
+            <a:avLst/>
+          </a:prstGeom>
+          <a:gradFill flip="none" rotWithShape="1">
+            <a:gsLst>
+              <a:gs pos="0">
+                <a:schemeClr val="accent2">
+                  <a:lumMod val="5000"/>
+                  <a:lumOff val="95000"/>
+                </a:schemeClr>
+              </a:gs>
+              <a:gs pos="74000">
+                <a:schemeClr val="accent2">
+                  <a:lumMod val="45000"/>
+                  <a:lumOff val="55000"/>
+                </a:schemeClr>
+              </a:gs>
+              <a:gs pos="83000">
+                <a:schemeClr val="accent2">
+                  <a:lumMod val="45000"/>
+                  <a:lumOff val="55000"/>
+                </a:schemeClr>
+              </a:gs>
+              <a:gs pos="100000">
+                <a:schemeClr val="accent2">
+                  <a:lumMod val="30000"/>
+                  <a:lumOff val="70000"/>
+                </a:schemeClr>
+              </a:gs>
+            </a:gsLst>
+            <a:lin ang="2700000" scaled="1"/>
+            <a:tileRect/>
+          </a:gradFill>
+          <a:ln>
+            <a:gradFill>
+              <a:gsLst>
+                <a:gs pos="62974">
+                  <a:srgbClr val="B6C8E8"/>
+                </a:gs>
+                <a:gs pos="0">
+                  <a:schemeClr val="accent1">
+                    <a:lumMod val="5000"/>
+                    <a:lumOff val="95000"/>
+                  </a:schemeClr>
+                </a:gs>
+                <a:gs pos="74000">
+                  <a:schemeClr val="accent1">
+                    <a:lumMod val="45000"/>
+                    <a:lumOff val="55000"/>
+                  </a:schemeClr>
+                </a:gs>
+                <a:gs pos="83000">
+                  <a:schemeClr val="accent1">
+                    <a:lumMod val="45000"/>
+                    <a:lumOff val="55000"/>
+                  </a:schemeClr>
+                </a:gs>
+                <a:gs pos="100000">
+                  <a:schemeClr val="accent1">
+                    <a:lumMod val="30000"/>
+                    <a:lumOff val="70000"/>
+                  </a:schemeClr>
+                </a:gs>
+              </a:gsLst>
+              <a:lin ang="5400000" scaled="1"/>
+            </a:gradFill>
+          </a:ln>
+        </p:spPr>
+        <p:style>
+          <a:lnRef idx="2">
+            <a:schemeClr val="accent1">
+              <a:shade val="15000"/>
+            </a:schemeClr>
+          </a:lnRef>
+          <a:fillRef idx="1">
+            <a:schemeClr val="accent1"/>
+          </a:fillRef>
+          <a:effectRef idx="0">
+            <a:schemeClr val="accent1"/>
+          </a:effectRef>
+          <a:fontRef idx="minor">
+            <a:schemeClr val="lt1"/>
+          </a:fontRef>
+        </p:style>
+        <p:txBody>
+          <a:bodyPr rtlCol="0" anchor="ctr"/>
+          <a:lstStyle/>
+          <a:p>
+            <a:pPr algn="ctr"/>
+            <a:endParaRPr lang="en-CH" dirty="0"/>
+          </a:p>
+        </p:txBody>
+      </p:sp>
+      <p:sp>
+        <p:nvSpPr>
+          <p:cNvPr id="67" name="Right Arrow 66">
+            <a:extLst>
+              <a:ext uri="{FF2B5EF4-FFF2-40B4-BE49-F238E27FC236}">
+                <a16:creationId xmlns:a16="http://schemas.microsoft.com/office/drawing/2014/main" id="{73C66BCF-E0E7-1F30-588A-3679077176E0}"/>
+              </a:ext>
+            </a:extLst>
+          </p:cNvPr>
+          <p:cNvSpPr/>
+          <p:nvPr/>
+        </p:nvSpPr>
+        <p:spPr>
+          <a:xfrm>
+            <a:off x="9540103" y="4386648"/>
+            <a:ext cx="1521225" cy="349943"/>
+          </a:xfrm>
+          <a:prstGeom prst="rightArrow">
+            <a:avLst/>
+          </a:prstGeom>
+          <a:gradFill flip="none" rotWithShape="1">
+            <a:gsLst>
+              <a:gs pos="0">
+                <a:schemeClr val="accent2">
+                  <a:lumMod val="5000"/>
+                  <a:lumOff val="95000"/>
+                </a:schemeClr>
+              </a:gs>
+              <a:gs pos="74000">
+                <a:schemeClr val="accent2">
+                  <a:lumMod val="45000"/>
+                  <a:lumOff val="55000"/>
+                </a:schemeClr>
+              </a:gs>
+              <a:gs pos="83000">
+                <a:schemeClr val="accent2">
+                  <a:lumMod val="45000"/>
+                  <a:lumOff val="55000"/>
+                </a:schemeClr>
+              </a:gs>
+              <a:gs pos="100000">
+                <a:schemeClr val="accent2">
+                  <a:lumMod val="30000"/>
+                  <a:lumOff val="70000"/>
+                </a:schemeClr>
+              </a:gs>
+            </a:gsLst>
+            <a:lin ang="2700000" scaled="1"/>
+            <a:tileRect/>
+          </a:gradFill>
+          <a:ln>
+            <a:gradFill>
+              <a:gsLst>
+                <a:gs pos="62974">
+                  <a:srgbClr val="B6C8E8"/>
+                </a:gs>
+                <a:gs pos="0">
+                  <a:schemeClr val="accent1">
+                    <a:lumMod val="5000"/>
+                    <a:lumOff val="95000"/>
+                  </a:schemeClr>
+                </a:gs>
+                <a:gs pos="74000">
+                  <a:schemeClr val="accent1">
+                    <a:lumMod val="45000"/>
+                    <a:lumOff val="55000"/>
+                  </a:schemeClr>
+                </a:gs>
+                <a:gs pos="83000">
+                  <a:schemeClr val="accent1">
+                    <a:lumMod val="45000"/>
+                    <a:lumOff val="55000"/>
+                  </a:schemeClr>
+                </a:gs>
+                <a:gs pos="100000">
+                  <a:schemeClr val="accent1">
+                    <a:lumMod val="30000"/>
+                    <a:lumOff val="70000"/>
+                  </a:schemeClr>
+                </a:gs>
+              </a:gsLst>
+              <a:lin ang="5400000" scaled="1"/>
+            </a:gradFill>
+          </a:ln>
+        </p:spPr>
+        <p:style>
+          <a:lnRef idx="2">
+            <a:schemeClr val="accent1">
+              <a:shade val="15000"/>
+            </a:schemeClr>
+          </a:lnRef>
+          <a:fillRef idx="1">
+            <a:schemeClr val="accent1"/>
+          </a:fillRef>
+          <a:effectRef idx="0">
+            <a:schemeClr val="accent1"/>
+          </a:effectRef>
+          <a:fontRef idx="minor">
+            <a:schemeClr val="lt1"/>
+          </a:fontRef>
+        </p:style>
+        <p:txBody>
+          <a:bodyPr rtlCol="0" anchor="ctr"/>
+          <a:lstStyle/>
+          <a:p>
+            <a:pPr algn="ctr"/>
+            <a:endParaRPr lang="en-CH" dirty="0"/>
+          </a:p>
+        </p:txBody>
+      </p:sp>
+      <p:pic>
+        <p:nvPicPr>
+          <p:cNvPr id="75" name="Graphic 74" descr="Checkbox Ticked with solid fill">
+            <a:extLst>
+              <a:ext uri="{FF2B5EF4-FFF2-40B4-BE49-F238E27FC236}">
+                <a16:creationId xmlns:a16="http://schemas.microsoft.com/office/drawing/2014/main" id="{D3E5F3F7-A498-D2EC-625D-F5008F13AB53}"/>
+              </a:ext>
+            </a:extLst>
+          </p:cNvPr>
+          <p:cNvPicPr>
+            <a:picLocks noChangeAspect="1"/>
+          </p:cNvPicPr>
+          <p:nvPr/>
+        </p:nvPicPr>
+        <p:blipFill>
+          <a:blip>
+            <a:extLst>
+              <a:ext uri="{96DAC541-7B7A-43D3-8B79-37D633B846F1}">
+                <asvg:svgBlip xmlns:asvg="http://schemas.microsoft.com/office/drawing/2016/SVG/main" r:embed="rId3"/>
+              </a:ext>
+            </a:extLst>
+          </a:blip>
+          <a:stretch>
+            <a:fillRect/>
+          </a:stretch>
+        </p:blipFill>
+        <p:spPr>
+          <a:xfrm>
+            <a:off x="1972756" y="5508060"/>
+            <a:ext cx="457199" cy="457199"/>
+          </a:xfrm>
+          <a:prstGeom prst="rect">
+            <a:avLst/>
+          </a:prstGeom>
+        </p:spPr>
+      </p:pic>
+      <p:pic>
+        <p:nvPicPr>
+          <p:cNvPr id="76" name="Graphic 75" descr="Checkbox Ticked with solid fill">
+            <a:extLst>
+              <a:ext uri="{FF2B5EF4-FFF2-40B4-BE49-F238E27FC236}">
+                <a16:creationId xmlns:a16="http://schemas.microsoft.com/office/drawing/2014/main" id="{429F3C4A-C77D-F831-79A0-4DD0E46D4AB1}"/>
+              </a:ext>
+            </a:extLst>
+          </p:cNvPr>
+          <p:cNvPicPr>
+            <a:picLocks noChangeAspect="1"/>
+          </p:cNvPicPr>
+          <p:nvPr/>
+        </p:nvPicPr>
+        <p:blipFill>
+          <a:blip>
+            <a:extLst>
+              <a:ext uri="{96DAC541-7B7A-43D3-8B79-37D633B846F1}">
+                <asvg:svgBlip xmlns:asvg="http://schemas.microsoft.com/office/drawing/2016/SVG/main" r:embed="rId4"/>
+              </a:ext>
+            </a:extLst>
+          </a:blip>
+          <a:stretch>
+            <a:fillRect/>
+          </a:stretch>
+        </p:blipFill>
+        <p:spPr>
+          <a:xfrm>
+            <a:off x="2445513" y="5511609"/>
+            <a:ext cx="457199" cy="457199"/>
+          </a:xfrm>
+          <a:prstGeom prst="rect">
+            <a:avLst/>
+          </a:prstGeom>
+        </p:spPr>
+      </p:pic>
+      <p:pic>
+        <p:nvPicPr>
+          <p:cNvPr id="78" name="Graphic 77" descr="Stop outline">
+            <a:extLst>
+              <a:ext uri="{FF2B5EF4-FFF2-40B4-BE49-F238E27FC236}">
+                <a16:creationId xmlns:a16="http://schemas.microsoft.com/office/drawing/2014/main" id="{BA507C11-8B2D-7E02-5FFB-8D5BBC6AC638}"/>
+              </a:ext>
+            </a:extLst>
+          </p:cNvPr>
+          <p:cNvPicPr>
+            <a:picLocks noChangeAspect="1"/>
+          </p:cNvPicPr>
+          <p:nvPr/>
+        </p:nvPicPr>
+        <p:blipFill>
+          <a:blip>
+            <a:extLst>
+              <a:ext uri="{96DAC541-7B7A-43D3-8B79-37D633B846F1}">
+                <asvg:svgBlip xmlns:asvg="http://schemas.microsoft.com/office/drawing/2016/SVG/main" r:embed="rId5"/>
+              </a:ext>
+            </a:extLst>
+          </a:blip>
+          <a:stretch>
+            <a:fillRect/>
+          </a:stretch>
+        </p:blipFill>
+        <p:spPr>
+          <a:xfrm>
+            <a:off x="5489696" y="5581926"/>
+            <a:ext cx="312432" cy="312432"/>
+          </a:xfrm>
+          <a:prstGeom prst="rect">
+            <a:avLst/>
+          </a:prstGeom>
+        </p:spPr>
+      </p:pic>
+      <p:pic>
+        <p:nvPicPr>
+          <p:cNvPr id="79" name="Graphic 78" descr="Stop outline">
+            <a:extLst>
+              <a:ext uri="{FF2B5EF4-FFF2-40B4-BE49-F238E27FC236}">
+                <a16:creationId xmlns:a16="http://schemas.microsoft.com/office/drawing/2014/main" id="{BCC4FC30-FD91-2B8A-741F-6F54AFE89580}"/>
+              </a:ext>
+            </a:extLst>
+          </p:cNvPr>
+          <p:cNvPicPr>
+            <a:picLocks noChangeAspect="1"/>
+          </p:cNvPicPr>
+          <p:nvPr/>
+        </p:nvPicPr>
+        <p:blipFill>
+          <a:blip>
+            <a:extLst>
+              <a:ext uri="{96DAC541-7B7A-43D3-8B79-37D633B846F1}">
+                <asvg:svgBlip xmlns:asvg="http://schemas.microsoft.com/office/drawing/2016/SVG/main" r:embed="rId6"/>
+              </a:ext>
+            </a:extLst>
+          </a:blip>
+          <a:stretch>
+            <a:fillRect/>
+          </a:stretch>
+        </p:blipFill>
+        <p:spPr>
+          <a:xfrm>
+            <a:off x="8260328" y="5590302"/>
+            <a:ext cx="312432" cy="312432"/>
+          </a:xfrm>
+          <a:prstGeom prst="rect">
+            <a:avLst/>
+          </a:prstGeom>
+        </p:spPr>
+      </p:pic>
+      <p:pic>
+        <p:nvPicPr>
+          <p:cNvPr id="80" name="Graphic 79" descr="Stop outline">
+            <a:extLst>
+              <a:ext uri="{FF2B5EF4-FFF2-40B4-BE49-F238E27FC236}">
+                <a16:creationId xmlns:a16="http://schemas.microsoft.com/office/drawing/2014/main" id="{20EB5E76-7B27-158C-8FAF-9082F3C08525}"/>
+              </a:ext>
+            </a:extLst>
+          </p:cNvPr>
+          <p:cNvPicPr>
+            <a:picLocks noChangeAspect="1"/>
+          </p:cNvPicPr>
+          <p:nvPr/>
+        </p:nvPicPr>
+        <p:blipFill>
+          <a:blip>
+            <a:extLst>
+              <a:ext uri="{96DAC541-7B7A-43D3-8B79-37D633B846F1}">
+                <asvg:svgBlip xmlns:asvg="http://schemas.microsoft.com/office/drawing/2016/SVG/main" r:embed="rId6"/>
+              </a:ext>
+            </a:extLst>
+          </a:blip>
+          <a:stretch>
+            <a:fillRect/>
+          </a:stretch>
+        </p:blipFill>
+        <p:spPr>
+          <a:xfrm>
+            <a:off x="11030960" y="5578702"/>
+            <a:ext cx="312432" cy="312432"/>
+          </a:xfrm>
+          <a:prstGeom prst="rect">
+            <a:avLst/>
+          </a:prstGeom>
+        </p:spPr>
+      </p:pic>
+      <p:grpSp>
+        <p:nvGrpSpPr>
+          <p:cNvPr id="83" name="Group 82">
+            <a:extLst>
+              <a:ext uri="{FF2B5EF4-FFF2-40B4-BE49-F238E27FC236}">
+                <a16:creationId xmlns:a16="http://schemas.microsoft.com/office/drawing/2014/main" id="{26E51072-DDB7-843E-C770-CF1D72E099B6}"/>
+              </a:ext>
+            </a:extLst>
+          </p:cNvPr>
+          <p:cNvGrpSpPr/>
+          <p:nvPr/>
+        </p:nvGrpSpPr>
+        <p:grpSpPr>
+          <a:xfrm>
+            <a:off x="10022221" y="1519823"/>
+            <a:ext cx="1480931" cy="671047"/>
+            <a:chOff x="10021701" y="1672467"/>
+            <a:chExt cx="1480931" cy="671047"/>
+          </a:xfrm>
+        </p:grpSpPr>
+        <p:pic>
+          <p:nvPicPr>
+            <p:cNvPr id="72" name="Graphic 71" descr="Checkbox Ticked with solid fill">
+              <a:extLst>
+                <a:ext uri="{FF2B5EF4-FFF2-40B4-BE49-F238E27FC236}">
+                  <a16:creationId xmlns:a16="http://schemas.microsoft.com/office/drawing/2014/main" id="{A5509287-A850-B19F-6FE0-3A9DAB47447A}"/>
+                </a:ext>
+              </a:extLst>
+            </p:cNvPr>
+            <p:cNvPicPr>
+              <a:picLocks noChangeAspect="1"/>
+            </p:cNvPicPr>
+            <p:nvPr/>
+          </p:nvPicPr>
+          <p:blipFill>
+            <a:blip>
+              <a:extLst>
+                <a:ext uri="{96DAC541-7B7A-43D3-8B79-37D633B846F1}">
+                  <asvg:svgBlip xmlns:asvg="http://schemas.microsoft.com/office/drawing/2016/SVG/main" r:embed="rId7"/>
+                </a:ext>
+              </a:extLst>
+            </a:blip>
+            <a:stretch>
+              <a:fillRect/>
+            </a:stretch>
+          </p:blipFill>
+          <p:spPr>
+            <a:xfrm>
+              <a:off x="10021701" y="1684154"/>
+              <a:ext cx="659360" cy="659360"/>
+            </a:xfrm>
+            <a:prstGeom prst="rect">
+              <a:avLst/>
+            </a:prstGeom>
+          </p:spPr>
+        </p:pic>
+        <p:pic>
+          <p:nvPicPr>
+            <p:cNvPr id="74" name="Graphic 73" descr="Checkbox Crossed with solid fill">
+              <a:extLst>
+                <a:ext uri="{FF2B5EF4-FFF2-40B4-BE49-F238E27FC236}">
+                  <a16:creationId xmlns:a16="http://schemas.microsoft.com/office/drawing/2014/main" id="{7E816392-510C-80CA-3D40-3FE4AD4FBC95}"/>
+                </a:ext>
+              </a:extLst>
+            </p:cNvPr>
+            <p:cNvPicPr>
+              <a:picLocks noChangeAspect="1"/>
+            </p:cNvPicPr>
+            <p:nvPr/>
+          </p:nvPicPr>
+          <p:blipFill>
+            <a:blip>
+              <a:extLst>
+                <a:ext uri="{96DAC541-7B7A-43D3-8B79-37D633B846F1}">
+                  <asvg:svgBlip xmlns:asvg="http://schemas.microsoft.com/office/drawing/2016/SVG/main" r:embed="rId8"/>
+                </a:ext>
+              </a:extLst>
+            </a:blip>
+            <a:stretch>
+              <a:fillRect/>
+            </a:stretch>
+          </p:blipFill>
+          <p:spPr>
+            <a:xfrm>
+              <a:off x="10483126" y="1672467"/>
+              <a:ext cx="659360" cy="659360"/>
+            </a:xfrm>
+            <a:prstGeom prst="rect">
+              <a:avLst/>
+            </a:prstGeom>
+          </p:spPr>
+        </p:pic>
+        <p:pic>
+          <p:nvPicPr>
+            <p:cNvPr id="82" name="Graphic 81" descr="Stop outline">
+              <a:extLst>
+                <a:ext uri="{FF2B5EF4-FFF2-40B4-BE49-F238E27FC236}">
+                  <a16:creationId xmlns:a16="http://schemas.microsoft.com/office/drawing/2014/main" id="{57CDA9AF-367D-4935-B0E2-2CC23F4F0BB0}"/>
+                </a:ext>
+              </a:extLst>
+            </p:cNvPr>
+            <p:cNvPicPr>
+              <a:picLocks noChangeAspect="1"/>
+            </p:cNvPicPr>
+            <p:nvPr/>
+          </p:nvPicPr>
+          <p:blipFill>
+            <a:blip>
+              <a:extLst>
+                <a:ext uri="{96DAC541-7B7A-43D3-8B79-37D633B846F1}">
+                  <asvg:svgBlip xmlns:asvg="http://schemas.microsoft.com/office/drawing/2016/SVG/main" r:embed="rId9"/>
+                </a:ext>
+              </a:extLst>
+            </a:blip>
+            <a:stretch>
+              <a:fillRect/>
+            </a:stretch>
+          </p:blipFill>
+          <p:spPr>
+            <a:xfrm>
+              <a:off x="11061328" y="1776767"/>
+              <a:ext cx="441304" cy="441304"/>
+            </a:xfrm>
+            <a:prstGeom prst="rect">
+              <a:avLst/>
+            </a:prstGeom>
+          </p:spPr>
+        </p:pic>
       </p:grpSp>
     </p:spTree>
   </p:cSld>
@@ -12195,7 +13386,23 @@
                 <a:ea typeface="Arial" pitchFamily="34" charset="-122"/>
                 <a:cs typeface="Arial" pitchFamily="34" charset="-120"/>
               </a:rPr>
-              <a:t>20 years in industrial operations. Covers all four work packages today. Targets the real pain, not a demo.</a:t>
+              <a:t>&gt;20 years in industrial operations (Eng. Process. Automation). </a:t>
+            </a:r>
+          </a:p>
+          <a:p>
+            <a:pPr marL="0" indent="0">
+              <a:buNone/>
+            </a:pPr>
+            <a:r>
+              <a:rPr lang="en-US" sz="1150" dirty="0">
+                <a:solidFill>
+                  <a:srgbClr val="5F5F5F"/>
+                </a:solidFill>
+                <a:latin typeface="Arial" pitchFamily="34" charset="0"/>
+                <a:ea typeface="Arial" pitchFamily="34" charset="-122"/>
+                <a:cs typeface="Arial" pitchFamily="34" charset="-120"/>
+              </a:rPr>
+              <a:t>Covers all four work packages today. Targets the real pain, not a demo.</a:t>
             </a:r>
             <a:endParaRPr lang="en-US" sz="1150" dirty="0"/>
           </a:p>
@@ -12339,7 +13546,7 @@
                 <a:ea typeface="Arial" pitchFamily="34" charset="-122"/>
                 <a:cs typeface="Arial" pitchFamily="34" charset="-120"/>
               </a:rPr>
-              <a:t>Automation / delivery engineer</a:t>
+              <a:t>Co-founders - Automation / delivery engineer</a:t>
             </a:r>
             <a:endParaRPr lang="en-US" sz="1250" dirty="0"/>
           </a:p>
@@ -12486,7 +13693,7 @@
                 <a:ea typeface="Arial" pitchFamily="34" charset="-122"/>
                 <a:cs typeface="Arial" pitchFamily="34" charset="-120"/>
               </a:rPr>
-              <a:t>Sales / business development</a:t>
+              <a:t>Key hires – Automation / Sales</a:t>
             </a:r>
             <a:endParaRPr lang="en-US" sz="1250" dirty="0"/>
           </a:p>
@@ -12633,7 +13840,7 @@
                 <a:ea typeface="Arial" pitchFamily="34" charset="-122"/>
                 <a:cs typeface="Arial" pitchFamily="34" charset="-120"/>
               </a:rPr>
-              <a:t>Client success / operations</a:t>
+              <a:t>Advisors - Client success / operations</a:t>
             </a:r>
             <a:endParaRPr lang="en-US" sz="1250" dirty="0"/>
           </a:p>
@@ -12780,7 +13987,7 @@
                 <a:ea typeface="Arial" pitchFamily="34" charset="-122"/>
                 <a:cs typeface="Arial" pitchFamily="34" charset="-120"/>
               </a:rPr>
-              <a:t>CH → EU expansion lead</a:t>
+              <a:t>Board - CH → EU expansion lead</a:t>
             </a:r>
             <a:endParaRPr lang="en-US" sz="1250" dirty="0"/>
           </a:p>
